--- a/The-Cell-Anatomy-and-Histology.pptx
+++ b/The-Cell-Anatomy-and-Histology.pptx
@@ -3249,6 +3249,75 @@
           </a:prstGeom>
         </p:spPr>
       </p:pic>
+      <p:pic>
+        <p:nvPicPr>
+          <p:cNvPr id="6" name="Picture 5" descr="QR code that opens the interactive web version of this deck at drsrennie-stack.github.io/A-P-lecture-core/cell-anatomy-histology.html"/>
+          <p:cNvPicPr>
+            <a:picLocks noChangeAspect="1"/>
+          </p:cNvPicPr>
+          <p:nvPr/>
+        </p:nvPicPr>
+        <p:blipFill>
+          <a:blip r:embed="rId3"/>
+          <a:stretch>
+            <a:fillRect/>
+          </a:stretch>
+        </p:blipFill>
+        <p:spPr>
+          <a:xfrm>
+            <a:off x="10195560" y="4343400"/>
+            <a:ext cx="1463040" cy="1463040"/>
+          </a:xfrm>
+          <a:prstGeom prst="rect">
+            <a:avLst/>
+          </a:prstGeom>
+        </p:spPr>
+      </p:pic>
+      <p:sp>
+        <p:nvSpPr>
+          <p:cNvPr id="7" name="TextBox 6"/>
+          <p:cNvSpPr txBox="1"/>
+          <p:nvPr/>
+        </p:nvSpPr>
+        <p:spPr>
+          <a:xfrm>
+            <a:off x="7680960" y="5943600"/>
+            <a:ext cx="4206240" cy="640080"/>
+          </a:xfrm>
+          <a:prstGeom prst="rect">
+            <a:avLst/>
+          </a:prstGeom>
+          <a:noFill/>
+        </p:spPr>
+        <p:txBody>
+          <a:bodyPr wrap="square" lIns="0" rIns="0" tIns="0" bIns="0">
+            <a:spAutoFit/>
+          </a:bodyPr>
+          <a:lstStyle/>
+          <a:p>
+            <a:r>
+              <a:rPr sz="1200" b="1" i="0">
+                <a:solidFill>
+                  <a:srgbClr val="C9A14A"/>
+                </a:solidFill>
+                <a:latin typeface="Calibri"/>
+              </a:rPr>
+              <a:t>Scan for the interactive page</a:t>
+            </a:r>
+          </a:p>
+          <a:p>
+            <a:r>
+              <a:rPr sz="1100" b="0" i="0">
+                <a:solidFill>
+                  <a:srgbClr val="E6EAF0"/>
+                </a:solidFill>
+                <a:latin typeface="Calibri"/>
+              </a:rPr>
+              <a:t>Download the .pptx and accessible PDF from Canvas or the course repo.</a:t>
+            </a:r>
+          </a:p>
+        </p:txBody>
+      </p:sp>
     </p:spTree>
   </p:cSld>
   <p:clrMapOvr>
@@ -3818,11 +3887,11 @@
                 <a:spcPct val="105000"/>
               </a:lnSpc>
               <a:spcAft>
-                <a:spcPts val="1100"/>
+                <a:spcPts val="900"/>
               </a:spcAft>
             </a:pPr>
             <a:r>
-              <a:rPr sz="1700" b="1" i="0">
+              <a:rPr sz="1500" b="1" i="0">
                 <a:solidFill>
                   <a:srgbClr val="8B3A2E"/>
                 </a:solidFill>
@@ -3831,7 +3900,7 @@
               <a:t>Not a sealed wall: </a:t>
             </a:r>
             <a:r>
-              <a:rPr sz="1700" b="0" i="0">
+              <a:rPr sz="1500" b="0" i="0">
                 <a:solidFill>
                   <a:srgbClr val="0B1530"/>
                 </a:solidFill>
@@ -3846,26 +3915,26 @@
                 <a:spcPct val="105000"/>
               </a:lnSpc>
               <a:spcAft>
-                <a:spcPts val="1100"/>
+                <a:spcPts val="900"/>
               </a:spcAft>
             </a:pPr>
             <a:r>
-              <a:rPr sz="1700" b="1" i="0">
+              <a:rPr sz="1500" b="1" i="0">
                 <a:solidFill>
                   <a:srgbClr val="8B3A2E"/>
                 </a:solidFill>
                 <a:latin typeface="Calibri"/>
               </a:rPr>
-              <a:t>Out: </a:t>
-            </a:r>
-            <a:r>
-              <a:rPr sz="1700" b="0" i="0">
-                <a:solidFill>
-                  <a:srgbClr val="0B1530"/>
-                </a:solidFill>
-                <a:latin typeface="Calibri"/>
-              </a:rPr>
-              <a:t>messenger RNA and ribosomal subunits, headed for protein synthesis.</a:t>
+              <a:t>Nuclear pore complex: </a:t>
+            </a:r>
+            <a:r>
+              <a:rPr sz="1500" b="0" i="0">
+                <a:solidFill>
+                  <a:srgbClr val="0B1530"/>
+                </a:solidFill>
+                <a:latin typeface="Calibri"/>
+              </a:rPr>
+              <a:t>eight subunits ring a central plug, giving the face view its star shape.</a:t>
             </a:r>
           </a:p>
           <a:p>
@@ -3874,26 +3943,26 @@
                 <a:spcPct val="105000"/>
               </a:lnSpc>
               <a:spcAft>
-                <a:spcPts val="1100"/>
+                <a:spcPts val="900"/>
               </a:spcAft>
             </a:pPr>
             <a:r>
-              <a:rPr sz="1700" b="1" i="0">
+              <a:rPr sz="1500" b="1" i="0">
                 <a:solidFill>
                   <a:srgbClr val="8B3A2E"/>
                 </a:solidFill>
                 <a:latin typeface="Calibri"/>
               </a:rPr>
-              <a:t>In: </a:t>
-            </a:r>
-            <a:r>
-              <a:rPr sz="1700" b="0" i="0">
-                <a:solidFill>
-                  <a:srgbClr val="0B1530"/>
-                </a:solidFill>
-                <a:latin typeface="Calibri"/>
-              </a:rPr>
-              <a:t>proteins built in the cytoplasm but needed inside the nucleus.</a:t>
+              <a:t>Out: </a:t>
+            </a:r>
+            <a:r>
+              <a:rPr sz="1500" b="0" i="0">
+                <a:solidFill>
+                  <a:srgbClr val="0B1530"/>
+                </a:solidFill>
+                <a:latin typeface="Calibri"/>
+              </a:rPr>
+              <a:t>messenger RNA and ribosomal subunits, headed for protein synthesis.</a:t>
             </a:r>
           </a:p>
           <a:p>
@@ -3902,33 +3971,61 @@
                 <a:spcPct val="105000"/>
               </a:lnSpc>
               <a:spcAft>
-                <a:spcPts val="1100"/>
+                <a:spcPts val="900"/>
               </a:spcAft>
             </a:pPr>
             <a:r>
-              <a:rPr sz="1700" b="1" i="0">
+              <a:rPr sz="1500" b="1" i="0">
                 <a:solidFill>
                   <a:srgbClr val="8B3A2E"/>
                 </a:solidFill>
                 <a:latin typeface="Calibri"/>
               </a:rPr>
+              <a:t>In: </a:t>
+            </a:r>
+            <a:r>
+              <a:rPr sz="1500" b="0" i="0">
+                <a:solidFill>
+                  <a:srgbClr val="0B1530"/>
+                </a:solidFill>
+                <a:latin typeface="Calibri"/>
+              </a:rPr>
+              <a:t>proteins built in the cytoplasm but needed inside the nucleus.</a:t>
+            </a:r>
+          </a:p>
+          <a:p>
+            <a:pPr>
+              <a:lnSpc>
+                <a:spcPct val="105000"/>
+              </a:lnSpc>
+              <a:spcAft>
+                <a:spcPts val="900"/>
+              </a:spcAft>
+            </a:pPr>
+            <a:r>
+              <a:rPr sz="1500" b="1" i="0">
+                <a:solidFill>
+                  <a:srgbClr val="8B3A2E"/>
+                </a:solidFill>
+                <a:latin typeface="Calibri"/>
+              </a:rPr>
               <a:t>Continuity: </a:t>
             </a:r>
             <a:r>
-              <a:rPr sz="1700" b="0" i="0">
-                <a:solidFill>
-                  <a:srgbClr val="0B1530"/>
-                </a:solidFill>
-                <a:latin typeface="Calibri"/>
-              </a:rPr>
-              <a:t>the outer membrane is studded with ribosomes and flows into the rough ER.</a:t>
+              <a:rPr sz="1500" b="0" i="0">
+                <a:solidFill>
+                  <a:srgbClr val="0B1530"/>
+                </a:solidFill>
+                <a:latin typeface="Calibri"/>
+              </a:rPr>
+              <a:t>the outer membrane flows into the rough ER.</a:t>
             </a:r>
           </a:p>
         </p:txBody>
       </p:sp>
       <p:pic>
         <p:nvPicPr>
-          <p:cNvPr id="5" name="Picture 4" descr="High-magnification TEM showing the nuclear envelope interrupted by nuclear pores, the edge of the nucleus, and a nearby mitochondrion."/>
+          <p:cNvPr id="5" name="Picture 4" descr="Original diagram of nuclear pore complexes: a cross-section showing the outer and inner membranes fusing around a pore with a central plug, and a face-on view of several complexes, each a ring of eight subunits around a central plug forming a star."/>
           <p:cNvPicPr>
             <a:picLocks noChangeAspect="1"/>
           </p:cNvPicPr>
@@ -3942,8 +4039,8 @@
         </p:blipFill>
         <p:spPr>
           <a:xfrm>
-            <a:off x="5993762" y="1417320"/>
-            <a:ext cx="5203194" cy="4892040"/>
+            <a:off x="5817870" y="1371600"/>
+            <a:ext cx="5554980" cy="2468880"/>
           </a:xfrm>
           <a:prstGeom prst="rect">
             <a:avLst/>
@@ -3958,7 +4055,7 @@
         </p:nvSpPr>
         <p:spPr>
           <a:xfrm>
-            <a:off x="5440680" y="6355079"/>
+            <a:off x="5440680" y="3886200"/>
             <a:ext cx="6309360" cy="640080"/>
           </a:xfrm>
           <a:prstGeom prst="rect">
@@ -3979,7 +4076,65 @@
                 </a:solidFill>
                 <a:latin typeface="Calibri"/>
               </a:rPr>
-              <a:t>Nuclear envelope (NE), nuclear pores (NP), mitochondrion (M).</a:t>
+              <a:t>Nuclear pore complex: cross-section and eight-subunit face view (diagram).</a:t>
+            </a:r>
+          </a:p>
+        </p:txBody>
+      </p:sp>
+      <p:pic>
+        <p:nvPicPr>
+          <p:cNvPr id="7" name="Picture 6" descr="High-magnification TEM showing the nuclear envelope interrupted by nuclear pores, the edge of the nucleus, and a nearby mitochondrion."/>
+          <p:cNvPicPr>
+            <a:picLocks noChangeAspect="1"/>
+          </p:cNvPicPr>
+          <p:nvPr/>
+        </p:nvPicPr>
+        <p:blipFill>
+          <a:blip r:embed="rId3"/>
+          <a:stretch>
+            <a:fillRect/>
+          </a:stretch>
+        </p:blipFill>
+        <p:spPr>
+          <a:xfrm>
+            <a:off x="7622800" y="4297680"/>
+            <a:ext cx="1945119" cy="1828800"/>
+          </a:xfrm>
+          <a:prstGeom prst="rect">
+            <a:avLst/>
+          </a:prstGeom>
+        </p:spPr>
+      </p:pic>
+      <p:sp>
+        <p:nvSpPr>
+          <p:cNvPr id="8" name="TextBox 7"/>
+          <p:cNvSpPr txBox="1"/>
+          <p:nvPr/>
+        </p:nvSpPr>
+        <p:spPr>
+          <a:xfrm>
+            <a:off x="5440680" y="6144768"/>
+            <a:ext cx="6309360" cy="640080"/>
+          </a:xfrm>
+          <a:prstGeom prst="rect">
+            <a:avLst/>
+          </a:prstGeom>
+          <a:noFill/>
+        </p:spPr>
+        <p:txBody>
+          <a:bodyPr wrap="square" lIns="0" rIns="0" tIns="0" bIns="0">
+            <a:spAutoFit/>
+          </a:bodyPr>
+          <a:lstStyle/>
+          <a:p>
+            <a:r>
+              <a:rPr sz="1200" b="1" i="0">
+                <a:solidFill>
+                  <a:srgbClr val="0B1530"/>
+                </a:solidFill>
+                <a:latin typeface="Calibri"/>
+              </a:rPr>
+              <a:t>Real TEM: nuclear envelope (NE), nuclear pores (NP), mitochondrion (M).</a:t>
             </a:r>
           </a:p>
           <a:p>
@@ -9147,8 +9302,8 @@
         </p:blipFill>
         <p:spPr>
           <a:xfrm>
-            <a:off x="5440680" y="2092343"/>
-            <a:ext cx="6309360" cy="3541993"/>
+            <a:off x="6192846" y="1371600"/>
+            <a:ext cx="4805026" cy="2697479"/>
           </a:xfrm>
           <a:prstGeom prst="rect">
             <a:avLst/>
@@ -9163,7 +9318,7 @@
         </p:nvSpPr>
         <p:spPr>
           <a:xfrm>
-            <a:off x="5440680" y="6355079"/>
+            <a:off x="5440680" y="4114800"/>
             <a:ext cx="6309360" cy="640080"/>
           </a:xfrm>
           <a:prstGeom prst="rect">
@@ -9196,6 +9351,64 @@
                 <a:latin typeface="Calibri"/>
               </a:rPr>
               <a:t>Histology image: LeBoffe histology, adapted by Rowley. Used with permission.</a:t>
+            </a:r>
+          </a:p>
+        </p:txBody>
+      </p:sp>
+      <p:pic>
+        <p:nvPicPr>
+          <p:cNvPr id="7" name="Picture 6" descr="Original diagram of the glycocalyx: sugar chains branch from glycoproteins and glycolipids on the outer face of the bilayer to form a fuzzy outer coat, with an integral protein spanning the membrane and the cytosol below."/>
+          <p:cNvPicPr>
+            <a:picLocks noChangeAspect="1"/>
+          </p:cNvPicPr>
+          <p:nvPr/>
+        </p:nvPicPr>
+        <p:blipFill>
+          <a:blip r:embed="rId3"/>
+          <a:stretch>
+            <a:fillRect/>
+          </a:stretch>
+        </p:blipFill>
+        <p:spPr>
+          <a:xfrm>
+            <a:off x="6387084" y="4526280"/>
+            <a:ext cx="4416552" cy="1600200"/>
+          </a:xfrm>
+          <a:prstGeom prst="rect">
+            <a:avLst/>
+          </a:prstGeom>
+        </p:spPr>
+      </p:pic>
+      <p:sp>
+        <p:nvSpPr>
+          <p:cNvPr id="8" name="TextBox 7"/>
+          <p:cNvSpPr txBox="1"/>
+          <p:nvPr/>
+        </p:nvSpPr>
+        <p:spPr>
+          <a:xfrm>
+            <a:off x="5440680" y="6172200"/>
+            <a:ext cx="6309360" cy="640080"/>
+          </a:xfrm>
+          <a:prstGeom prst="rect">
+            <a:avLst/>
+          </a:prstGeom>
+          <a:noFill/>
+        </p:spPr>
+        <p:txBody>
+          <a:bodyPr wrap="square" lIns="0" rIns="0" tIns="0" bIns="0">
+            <a:spAutoFit/>
+          </a:bodyPr>
+          <a:lstStyle/>
+          <a:p>
+            <a:r>
+              <a:rPr sz="1200" b="1" i="0">
+                <a:solidFill>
+                  <a:srgbClr val="0B1530"/>
+                </a:solidFill>
+                <a:latin typeface="Calibri"/>
+              </a:rPr>
+              <a:t>Glycocalyx: the sugar coat on the membrane (diagram).</a:t>
             </a:r>
           </a:p>
         </p:txBody>
